--- a/Unit-1-Ch-4/Ch4-State-Building-Africa.pptx
+++ b/Unit-1-Ch-4/Ch4-State-Building-Africa.pptx
@@ -7426,7 +7426,7 @@
                 <a:ea typeface="Calibri" pitchFamily="34" charset="-122"/>
                 <a:cs typeface="Calibri" pitchFamily="34" charset="-120"/>
               </a:rPr>
-              <a:t>★ Wealthiest state in the world at its height. Know: Sundiata (founder), Mansa Musa (most famous ruler), Timbuktu (scholarship).</a:t>
+              <a:t>★ One of the wealthiest states in the world at its height. Know: Sundiata (founder), Mansa Musa (most famous ruler), Timbuktu (scholarship).</a:t>
             </a:r>
             <a:endParaRPr lang="en-US" sz="850" dirty="0"/>
           </a:p>
